--- a/templates/closing/closing_no_photo_A.pptx
+++ b/templates/closing/closing_no_photo_A.pptx
@@ -3148,8 +3148,8 @@
         </p:nvSpPr>
         <p:spPr>
           <a:xfrm>
-            <a:off x="2592000" y="4554000"/>
-            <a:ext cx="2376000" cy="19050"/>
+            <a:off x="2952000" y="4410000"/>
+            <a:ext cx="1656000" cy="17780"/>
           </a:xfrm>
           <a:prstGeom prst="rect">
             <a:avLst/>
@@ -3192,8 +3192,8 @@
         </p:nvSpPr>
         <p:spPr>
           <a:xfrm>
-            <a:off x="432000" y="4842000"/>
-            <a:ext cx="6696000" cy="864000"/>
+            <a:off x="432000" y="4770000"/>
+            <a:ext cx="6696000" cy="720000"/>
           </a:xfrm>
           <a:prstGeom prst="rect">
             <a:avLst/>
@@ -3212,7 +3212,7 @@
               </a:lnSpc>
             </a:pPr>
             <a:r>
-              <a:rPr sz="1900" b="1">
+              <a:rPr sz="2000" b="1">
                 <a:solidFill>
                   <a:srgbClr val="FFFFFF"/>
                 </a:solidFill>
@@ -3231,7 +3231,7 @@
         </p:nvSpPr>
         <p:spPr>
           <a:xfrm>
-            <a:off x="432000" y="5706000"/>
+            <a:off x="432000" y="5526000"/>
             <a:ext cx="6696000" cy="324000"/>
           </a:xfrm>
           <a:prstGeom prst="rect">
@@ -3253,7 +3253,7 @@
             <a:r>
               <a:rPr sz="1200" b="0">
                 <a:solidFill>
-                  <a:srgbClr val="DCDEE4"/>
+                  <a:srgbClr val="CDD2DE"/>
                 </a:solidFill>
                 <a:latin typeface="맑은 고딕"/>
               </a:rPr>
@@ -3270,7 +3270,7 @@
         </p:nvSpPr>
         <p:spPr>
           <a:xfrm>
-            <a:off x="432000" y="6030000"/>
+            <a:off x="432000" y="5850000"/>
             <a:ext cx="6696000" cy="324000"/>
           </a:xfrm>
           <a:prstGeom prst="rect">
@@ -3292,7 +3292,7 @@
             <a:r>
               <a:rPr sz="1200" b="0">
                 <a:solidFill>
-                  <a:srgbClr val="DCDEE4"/>
+                  <a:srgbClr val="CDD2DE"/>
                 </a:solidFill>
                 <a:latin typeface="맑은 고딕"/>
               </a:rPr>
